--- a/figs/Graphical_abstract.pptx
+++ b/figs/Graphical_abstract.pptx
@@ -104,6 +104,11 @@
       </a:defRPr>
     </a:lvl9pPr>
   </p:defaultTextStyle>
+  <p:extLst>
+    <p:ext uri="{EFAFB233-063F-42B5-8137-9DF3F51BA10A}">
+      <p15:sldGuideLst xmlns:p15="http://schemas.microsoft.com/office/powerpoint/2012/main"/>
+    </p:ext>
+  </p:extLst>
 </p:presentation>
 </file>
 
@@ -3080,7 +3085,7 @@
             </a:r>
             <a:r>
               <a:rPr lang="en-US" dirty="0"/>
-              <a:t>estimate covariate impacts on nearby habitats with lagged responses.</a:t>
+              <a:t>estimate covariate impacts on population density in nearby habitats over time-lagged responses.</a:t>
             </a:r>
           </a:p>
           <a:p>
@@ -3138,7 +3143,7 @@
         <p:spPr>
           <a:xfrm>
             <a:off x="97427" y="2396953"/>
-            <a:ext cx="4450405" cy="369332"/>
+            <a:ext cx="4450405" cy="338554"/>
           </a:xfrm>
           <a:prstGeom prst="rect">
             <a:avLst/>
@@ -3152,7 +3157,7 @@
           <a:lstStyle/>
           <a:p>
             <a:r>
-              <a:rPr lang="en-US" dirty="0"/>
+              <a:rPr lang="en-US" sz="1600" dirty="0"/>
               <a:t>… and is significant for capelin.</a:t>
             </a:r>
           </a:p>
@@ -3187,7 +3192,7 @@
         </p:blipFill>
         <p:spPr>
           <a:xfrm>
-            <a:off x="5261717" y="571451"/>
+            <a:off x="5295764" y="906836"/>
             <a:ext cx="1057558" cy="4116031"/>
           </a:xfrm>
           <a:prstGeom prst="rect">
@@ -3224,7 +3229,7 @@
         </p:blipFill>
         <p:spPr>
           <a:xfrm>
-            <a:off x="6319275" y="571451"/>
+            <a:off x="6353322" y="906836"/>
             <a:ext cx="898498" cy="3894494"/>
           </a:xfrm>
           <a:prstGeom prst="rect">
@@ -3426,8 +3431,8 @@
         </p:blipFill>
         <p:spPr>
           <a:xfrm>
-            <a:off x="5092068" y="4544461"/>
-            <a:ext cx="1914695" cy="2210603"/>
+            <a:off x="5161184" y="4937540"/>
+            <a:ext cx="1506516" cy="1739342"/>
           </a:xfrm>
           <a:prstGeom prst="rect">
             <a:avLst/>
@@ -3448,7 +3453,7 @@
         </p:nvSpPr>
         <p:spPr>
           <a:xfrm rot="16200000">
-            <a:off x="4454517" y="1402645"/>
+            <a:off x="4488564" y="1738030"/>
             <a:ext cx="1037463" cy="307777"/>
           </a:xfrm>
           <a:prstGeom prst="rect">
@@ -3485,7 +3490,7 @@
             </p:nvSpPr>
             <p:spPr>
               <a:xfrm rot="16200000">
-                <a:off x="4403282" y="2270407"/>
+                <a:off x="4437329" y="2605792"/>
                 <a:ext cx="1037463" cy="738664"/>
               </a:xfrm>
               <a:prstGeom prst="rect">
@@ -3573,7 +3578,7 @@
             </p:nvSpPr>
             <p:spPr>
               <a:xfrm rot="16200000">
-                <a:off x="4403282" y="2270407"/>
+                <a:off x="4437329" y="2605792"/>
                 <a:ext cx="1037463" cy="738664"/>
               </a:xfrm>
               <a:prstGeom prst="rect">
@@ -3582,7 +3587,7 @@
               <a:blipFill>
                 <a:blip r:embed="rId7"/>
                 <a:stretch>
-                  <a:fillRect l="-1653" t="-4118" r="-7438" b="-1176"/>
+                  <a:fillRect l="-820" t="-4118" r="-7377" b="-1176"/>
                 </a:stretch>
               </a:blipFill>
             </p:spPr>
@@ -3615,7 +3620,7 @@
         </p:nvSpPr>
         <p:spPr>
           <a:xfrm rot="16200000">
-            <a:off x="4385856" y="3464909"/>
+            <a:off x="4419903" y="3800294"/>
             <a:ext cx="1037463" cy="738664"/>
           </a:xfrm>
           <a:prstGeom prst="rect">
